--- a/Denver/Common-Altitude-2027/decks/04-Sponsors-and-Hospitality.pptx
+++ b/Denver/Common-Altitude-2027/decks/04-Sponsors-and-Hospitality.pptx
@@ -525,12 +525,12 @@
           <a:p/>
           <a:p>
             <a:r>
-              <a:t>SPONSORSHIP + DESTINATION PARTNERSHIPS</a:t>
-            </a:r>
-          </a:p>
-          <a:p>
-            <a:r>
-              <a:t>Art. Public imagination. A reason to come.</a:t>
+              <a:t>SPONSORSHIP AND DESTINATION PARTNERSHIPS</a:t>
+            </a:r>
+          </a:p>
+          <a:p>
+            <a:r>
+              <a:t>A proposed Denver art fair and public program.</a:t>
             </a:r>
           </a:p>
           <a:p/>
@@ -538,7 +538,7 @@
           <a:p/>
           <a:p>
             <a:r>
-              <a:t>Status: working proposal; site/date/partners/funding/capacities unconfirmed. No external action is authorized by the deck.</a:t>
+              <a:t>Status: working proposal. Site, dates, partners, funding and capacity need confirmation. The deck grants no external-action authority.</a:t>
             </a:r>
           </a:p>
           <a:p>
@@ -628,13 +628,13 @@
           </a:p>
           <a:p>
             <a:r>
-              <a:t>A first step can be bounded.</a:t>
+              <a:t>Discovery support</a:t>
             </a:r>
           </a:p>
           <a:p/>
           <a:p>
             <a:r>
-              <a:t>Discovery support may be credited once toward an agreed later package.</a:t>
+              <a:t>A contract may count discovery support once toward a later sponsorship package.</a:t>
             </a:r>
           </a:p>
           <a:p/>
@@ -656,7 +656,7 @@
           <a:p/>
           <a:p>
             <a:r>
-              <a:t>Status: working proposal; site/date/partners/funding/capacities unconfirmed. No external action is authorized by the deck.</a:t>
+              <a:t>Status: working proposal. Site, dates, partners, funding and capacity need confirmation. The deck grants no external-action authority.</a:t>
             </a:r>
           </a:p>
           <a:p>
@@ -746,13 +746,13 @@
           </a:p>
           <a:p>
             <a:r>
-              <a:t>Make the partnership practical.</a:t>
+              <a:t>Commercial terms</a:t>
             </a:r>
           </a:p>
           <a:p/>
           <a:p>
             <a:r>
-              <a:t>Professional responsibility matters as much as creative ambition.</a:t>
+              <a:t>Each partnership needs payment, cancellation, exclusivity, rights and approval terms.</a:t>
             </a:r>
           </a:p>
           <a:p/>
@@ -763,18 +763,18 @@
           </a:p>
           <a:p>
             <a:r>
-              <a:t>Cost / Every activation/hospitality promise priced and funded.</a:t>
-            </a:r>
-          </a:p>
-          <a:p>
-            <a:r>
-              <a:t>Approval / Owner, artist and specialist permissions respected.</a:t>
+              <a:t>Cost / Price and fund each program and hospitality benefit.</a:t>
+            </a:r>
+          </a:p>
+          <a:p>
+            <a:r>
+              <a:t>Approval / Obtain owner, artist and specialist permissions.</a:t>
             </a:r>
           </a:p>
           <a:p/>
           <a:p>
             <a:r>
-              <a:t>Status: working proposal; site/date/partners/funding/capacities unconfirmed. No external action is authorized by the deck.</a:t>
+              <a:t>Status: working proposal. Site, dates, partners, funding and capacity need confirmation. The deck grants no external-action authority.</a:t>
             </a:r>
           </a:p>
           <a:p>
@@ -864,13 +864,13 @@
           </a:p>
           <a:p>
             <a:r>
-              <a:t>Find the right partnership.</a:t>
+              <a:t>Partnership discussion</a:t>
             </a:r>
           </a:p>
           <a:p/>
           <a:p>
             <a:r>
-              <a:t>Start with business objectives and a specific funded chapter, not a generic logo placement.</a:t>
+              <a:t>Identify the sponsor’s objective and a specific program it can fund.</a:t>
             </a:r>
           </a:p>
           <a:p/>
@@ -892,7 +892,7 @@
           <a:p/>
           <a:p>
             <a:r>
-              <a:t>Status: working proposal; site/date/partners/funding/capacities unconfirmed. No external action is authorized by the deck.</a:t>
+              <a:t>Status: working proposal. Site, dates, partners, funding and capacity need confirmation. The deck grants no external-action authority.</a:t>
             </a:r>
           </a:p>
           <a:p>
@@ -982,7 +982,7 @@
           </a:p>
           <a:p>
             <a:r>
-              <a:t>A proposal with visible assumptions.</a:t>
+              <a:t>Sources and open assumptions</a:t>
             </a:r>
           </a:p>
           <a:p/>
@@ -1010,7 +1010,7 @@
           <a:p/>
           <a:p>
             <a:r>
-              <a:t>Status: working proposal; site/date/partners/funding/capacities unconfirmed. No external action is authorized by the deck.</a:t>
+              <a:t>Status: working proposal. Site, dates, partners, funding and capacity need confirmation. The deck grants no external-action authority.</a:t>
             </a:r>
           </a:p>
           <a:p>
@@ -1100,13 +1100,13 @@
           </a:p>
           <a:p>
             <a:r>
-              <a:t>Three audiences, one coherent experience.</a:t>
+              <a:t>Three audience groups</a:t>
             </a:r>
           </a:p>
           <a:p/>
           <a:p>
             <a:r>
-              <a:t>Every number is a target until measured.</a:t>
+              <a:t>The proposal serves collectors, residents and artists. Audience sizes remain targets.</a:t>
             </a:r>
           </a:p>
           <a:p/>
@@ -1122,13 +1122,13 @@
           </a:p>
           <a:p>
             <a:r>
-              <a:t>Creative community / Paid artist, teaching and program contribution.</a:t>
+              <a:t>Creative community / Fees for artists, teaching and public programs.</a:t>
             </a:r>
           </a:p>
           <a:p/>
           <a:p>
             <a:r>
-              <a:t>Status: working proposal; site/date/partners/funding/capacities unconfirmed. No external action is authorized by the deck.</a:t>
+              <a:t>Status: working proposal. Site, dates, partners, funding and capacity need confirmation. The deck grants no external-action authority.</a:t>
             </a:r>
           </a:p>
           <a:p>
@@ -1218,13 +1218,13 @@
           </a:p>
           <a:p>
             <a:r>
-              <a:t>The audience case to validate.</a:t>
+              <a:t>Audience targets</a:t>
             </a:r>
           </a:p>
           <a:p/>
           <a:p>
             <a:r>
-              <a:t>No sponsor is being sold an already-proven crowd.</a:t>
+              <a:t>The project has no measured event audience to offer sponsors.</a:t>
             </a:r>
           </a:p>
           <a:p/>
@@ -1246,7 +1246,7 @@
           <a:p/>
           <a:p>
             <a:r>
-              <a:t>Status: working proposal; site/date/partners/funding/capacities unconfirmed. No external action is authorized by the deck.</a:t>
+              <a:t>Status: working proposal. Site, dates, partners, funding and capacity need confirmation. The deck grants no external-action authority.</a:t>
             </a:r>
           </a:p>
           <a:p>
@@ -1336,13 +1336,13 @@
           </a:p>
           <a:p>
             <a:r>
-              <a:t>Choose a meaningful chapter.</a:t>
+              <a:t>Program sponsorship options</a:t>
             </a:r>
           </a:p>
           <a:p/>
           <a:p>
             <a:r>
-              <a:t>Activations follow artistic/site/rights approval and are costed.</a:t>
+              <a:t>Price each activity and obtain site, artist and rights approval before offering it.</a:t>
             </a:r>
           </a:p>
           <a:p/>
@@ -1364,7 +1364,7 @@
           <a:p/>
           <a:p>
             <a:r>
-              <a:t>Status: working proposal; site/date/partners/funding/capacities unconfirmed. No external action is authorized by the deck.</a:t>
+              <a:t>Status: working proposal. Site, dates, partners, funding and capacity need confirmation. The deck grants no external-action authority.</a:t>
             </a:r>
           </a:p>
           <a:p>
@@ -1454,13 +1454,13 @@
           </a:p>
           <a:p>
             <a:r>
-              <a:t>A package architecture to test.</a:t>
+              <a:t>Sponsorship packages</a:t>
             </a:r>
           </a:p>
           <a:p/>
           <a:p>
             <a:r>
-              <a:t>Cash target $1.25m. No package is sold or demand validated.</a:t>
+              <a:t>The $1.25m target assumes sales of these proposed packages. No sponsor has bought one.</a:t>
             </a:r>
           </a:p>
           <a:p/>
@@ -1487,7 +1487,7 @@
           <a:p/>
           <a:p>
             <a:r>
-              <a:t>Status: working proposal; site/date/partners/funding/capacities unconfirmed. No external action is authorized by the deck.</a:t>
+              <a:t>Status: working proposal. Site, dates, partners, funding and capacity need confirmation. The deck grants no external-action authority.</a:t>
             </a:r>
           </a:p>
           <a:p>
@@ -1577,13 +1577,13 @@
           </a:p>
           <a:p>
             <a:r>
-              <a:t>Benefits with a delivery owner.</a:t>
+              <a:t>Contracted benefits and evidence</a:t>
             </a:r>
           </a:p>
           <a:p/>
           <a:p>
             <a:r>
-              <a:t>Define the audience, cost, rights, capacity and proof for each benefit.</a:t>
+              <a:t>Assign a responsible person, cost, rights, capacity and delivery measure to each benefit.</a:t>
             </a:r>
           </a:p>
           <a:p/>
@@ -1605,7 +1605,7 @@
           <a:p/>
           <a:p>
             <a:r>
-              <a:t>Status: working proposal; site/date/partners/funding/capacities unconfirmed. No external action is authorized by the deck.</a:t>
+              <a:t>Status: working proposal. Site, dates, partners, funding and capacity need confirmation. The deck grants no external-action authority.</a:t>
             </a:r>
           </a:p>
           <a:p>
@@ -1695,13 +1695,13 @@
           </a:p>
           <a:p>
             <a:r>
-              <a:t>Creative integrity protects value.</a:t>
+              <a:t>Editorial independence and privacy</a:t>
             </a:r>
           </a:p>
           <a:p/>
           <a:p>
             <a:r>
-              <a:t>A strong brand association comes from real quality.</a:t>
+              <a:t>Sponsor terms must protect artist selection, image rights and visitor information.</a:t>
             </a:r>
           </a:p>
           <a:p/>
@@ -1723,7 +1723,7 @@
           <a:p/>
           <a:p>
             <a:r>
-              <a:t>Status: working proposal; site/date/partners/funding/capacities unconfirmed. No external action is authorized by the deck.</a:t>
+              <a:t>Status: working proposal. Site, dates, partners, funding and capacity need confirmation. The deck grants no external-action authority.</a:t>
             </a:r>
           </a:p>
           <a:p>
@@ -1813,13 +1813,13 @@
           </a:p>
           <a:p>
             <a:r>
-              <a:t>A useful destination week.</a:t>
+              <a:t>Proposed event week</a:t>
             </a:r>
           </a:p>
           <a:p/>
           <a:p>
             <a:r>
-              <a:t>Proposed August 9–15, 2027; dates/site remain unbooked.</a:t>
+              <a:t>August 9–15, 2027 remains unbooked. The program and site need approval.</a:t>
             </a:r>
           </a:p>
           <a:p/>
@@ -1841,7 +1841,7 @@
           <a:p/>
           <a:p>
             <a:r>
-              <a:t>Status: working proposal; site/date/partners/funding/capacities unconfirmed. No external action is authorized by the deck.</a:t>
+              <a:t>Status: working proposal. Site, dates, partners, funding and capacity need confirmation. The deck grants no external-action authority.</a:t>
             </a:r>
           </a:p>
           <a:p>
@@ -1931,13 +1931,13 @@
           </a:p>
           <a:p>
             <a:r>
-              <a:t>What we will measure.</a:t>
+              <a:t>Sponsor reporting</a:t>
             </a:r>
           </a:p>
           <a:p/>
           <a:p>
             <a:r>
-              <a:t>Measure contracted value rather than inventing reach.</a:t>
+              <a:t>Report actual delivery, participation and artist outcomes against the contract.</a:t>
             </a:r>
           </a:p>
           <a:p/>
@@ -1959,7 +1959,7 @@
           <a:p/>
           <a:p>
             <a:r>
-              <a:t>Status: working proposal; site/date/partners/funding/capacities unconfirmed. No external action is authorized by the deck.</a:t>
+              <a:t>Status: working proposal. Site, dates, partners, funding and capacity need confirmation. The deck grants no external-action authority.</a:t>
             </a:r>
           </a:p>
           <a:p>
@@ -5140,7 +5140,7 @@
               </a:defRPr>
             </a:pPr>
             <a:r>
-              <a:t>SPONSORSHIP + DESTINATION PARTNERSHIPS</a:t>
+              <a:t>SPONSORSHIP AND DESTINATION PARTNERSHIPS</a:t>
             </a:r>
           </a:p>
           <a:p>
@@ -5162,7 +5162,7 @@
               </a:defRPr>
             </a:pPr>
             <a:r>
-              <a:t>Art. Public imagination. A reason to come.</a:t>
+              <a:t>A proposed Denver art fair and public program.</a:t>
             </a:r>
           </a:p>
         </p:txBody>
@@ -5845,7 +5845,7 @@
               </a:defRPr>
             </a:pPr>
             <a:r>
-              <a:t>A first step can be bounded.</a:t>
+              <a:t>Discovery support</a:t>
             </a:r>
           </a:p>
         </p:txBody>
@@ -5890,7 +5890,7 @@
               </a:defRPr>
             </a:pPr>
             <a:r>
-              <a:t>Discovery support may be credited once toward an agreed later package.</a:t>
+              <a:t>A contract may count discovery support once toward a later sponsorship package.</a:t>
             </a:r>
           </a:p>
         </p:txBody>
@@ -6734,7 +6734,7 @@
               </a:defRPr>
             </a:pPr>
             <a:r>
-              <a:t>Make the partnership practical.</a:t>
+              <a:t>Commercial terms</a:t>
             </a:r>
           </a:p>
         </p:txBody>
@@ -6779,7 +6779,7 @@
               </a:defRPr>
             </a:pPr>
             <a:r>
-              <a:t>Professional responsibility matters as much as creative ambition.</a:t>
+              <a:t>Each partnership needs payment, cancellation, exclusivity, rights and approval terms.</a:t>
             </a:r>
           </a:p>
         </p:txBody>
@@ -7175,7 +7175,7 @@
               </a:defRPr>
             </a:pPr>
             <a:r>
-              <a:t>Every activation/hospitality</a:t>
+              <a:t>Price and fund each program</a:t>
             </a:r>
           </a:p>
           <a:p>
@@ -7197,7 +7197,7 @@
               </a:defRPr>
             </a:pPr>
             <a:r>
-              <a:t>promise priced and funded.</a:t>
+              <a:t>and hospitality benefit.</a:t>
             </a:r>
           </a:p>
         </p:txBody>
@@ -7373,7 +7373,7 @@
               </a:defRPr>
             </a:pPr>
             <a:r>
-              <a:t>Owner, artist and specialist</a:t>
+              <a:t>Obtain owner, artist and</a:t>
             </a:r>
           </a:p>
           <a:p>
@@ -7395,7 +7395,7 @@
               </a:defRPr>
             </a:pPr>
             <a:r>
-              <a:t>permissions respected.</a:t>
+              <a:t>specialist permissions.</a:t>
             </a:r>
           </a:p>
         </p:txBody>
@@ -7689,7 +7689,7 @@
               </a:defRPr>
             </a:pPr>
             <a:r>
-              <a:t>Find the right partnership.</a:t>
+              <a:t>Partnership discussion</a:t>
             </a:r>
           </a:p>
         </p:txBody>
@@ -7734,29 +7734,7 @@
               </a:defRPr>
             </a:pPr>
             <a:r>
-              <a:t>Start with business objectives and a specific funded chapter, not a generic</a:t>
-            </a:r>
-          </a:p>
-          <a:p>
-            <a:pPr>
-              <a:lnSpc>
-                <a:spcPct val="108000"/>
-              </a:lnSpc>
-              <a:spcBef>
-                <a:spcPts val="0"/>
-              </a:spcBef>
-              <a:spcAft>
-                <a:spcPts val="0"/>
-              </a:spcAft>
-              <a:defRPr sz="2300" b="0">
-                <a:solidFill>
-                  <a:srgbClr val="F3F0E9"/>
-                </a:solidFill>
-                <a:latin typeface="Arial"/>
-              </a:defRPr>
-            </a:pPr>
-            <a:r>
-              <a:t>logo placement.</a:t>
+              <a:t>Identify the sponsor’s objective and a specific program it can fund.</a:t>
             </a:r>
           </a:p>
         </p:txBody>
@@ -8658,7 +8636,7 @@
               </a:defRPr>
             </a:pPr>
             <a:r>
-              <a:t>A proposal with visible assumptions.</a:t>
+              <a:t>Sources and open assumptions</a:t>
             </a:r>
           </a:p>
         </p:txBody>
@@ -9267,29 +9245,7 @@
               </a:defRPr>
             </a:pPr>
             <a:r>
-              <a:t>Three audiences, one coherent</a:t>
-            </a:r>
-          </a:p>
-          <a:p>
-            <a:pPr>
-              <a:lnSpc>
-                <a:spcPct val="108000"/>
-              </a:lnSpc>
-              <a:spcBef>
-                <a:spcPts val="0"/>
-              </a:spcBef>
-              <a:spcAft>
-                <a:spcPts val="0"/>
-              </a:spcAft>
-              <a:defRPr sz="5000" b="1">
-                <a:solidFill>
-                  <a:srgbClr val="151A22"/>
-                </a:solidFill>
-                <a:latin typeface="Arial"/>
-              </a:defRPr>
-            </a:pPr>
-            <a:r>
-              <a:t>experience.</a:t>
+              <a:t>Three audience groups</a:t>
             </a:r>
           </a:p>
         </p:txBody>
@@ -9302,7 +9258,7 @@
         </p:nvSpPr>
         <p:spPr>
           <a:xfrm>
-            <a:off x="914400" y="2585720"/>
+            <a:off x="914400" y="1887220"/>
             <a:ext cx="12618720" cy="1005840"/>
           </a:xfrm>
           <a:prstGeom prst="rect">
@@ -9334,7 +9290,7 @@
               </a:defRPr>
             </a:pPr>
             <a:r>
-              <a:t>Every number is a target until measured.</a:t>
+              <a:t>The proposal serves collectors, residents and artists. Audience sizes remain targets.</a:t>
             </a:r>
           </a:p>
         </p:txBody>
@@ -9347,8 +9303,8 @@
         </p:nvSpPr>
         <p:spPr>
           <a:xfrm>
-            <a:off x="914400" y="3190494"/>
-            <a:ext cx="4096511" cy="4152137"/>
+            <a:off x="914400" y="2852928"/>
+            <a:ext cx="4096511" cy="4489703"/>
           </a:xfrm>
           <a:prstGeom prst="rect">
             <a:avLst/>
@@ -9390,7 +9346,7 @@
         </p:nvSpPr>
         <p:spPr>
           <a:xfrm>
-            <a:off x="914400" y="3190494"/>
+            <a:off x="914400" y="2852928"/>
             <a:ext cx="4096511" cy="59436"/>
           </a:xfrm>
           <a:prstGeom prst="rect">
@@ -9433,7 +9389,7 @@
         </p:nvSpPr>
         <p:spPr>
           <a:xfrm>
-            <a:off x="1170432" y="3574542"/>
+            <a:off x="1170432" y="3236976"/>
             <a:ext cx="3584447" cy="1188720"/>
           </a:xfrm>
           <a:prstGeom prst="rect">
@@ -9478,8 +9434,8 @@
         </p:nvSpPr>
         <p:spPr>
           <a:xfrm>
-            <a:off x="1170432" y="4946142"/>
-            <a:ext cx="3584447" cy="2186177"/>
+            <a:off x="1170432" y="4608576"/>
+            <a:ext cx="3584447" cy="2523743"/>
           </a:xfrm>
           <a:prstGeom prst="rect">
             <a:avLst/>
@@ -9545,8 +9501,8 @@
         </p:nvSpPr>
         <p:spPr>
           <a:xfrm>
-            <a:off x="5266944" y="3190494"/>
-            <a:ext cx="4096511" cy="4152137"/>
+            <a:off x="5266944" y="2852928"/>
+            <a:ext cx="4096511" cy="4489703"/>
           </a:xfrm>
           <a:prstGeom prst="rect">
             <a:avLst/>
@@ -9588,7 +9544,7 @@
         </p:nvSpPr>
         <p:spPr>
           <a:xfrm>
-            <a:off x="5266944" y="3190494"/>
+            <a:off x="5266944" y="2852928"/>
             <a:ext cx="4096511" cy="59436"/>
           </a:xfrm>
           <a:prstGeom prst="rect">
@@ -9631,7 +9587,7 @@
         </p:nvSpPr>
         <p:spPr>
           <a:xfrm>
-            <a:off x="5522976" y="3574542"/>
+            <a:off x="5522976" y="3236976"/>
             <a:ext cx="3584447" cy="1188720"/>
           </a:xfrm>
           <a:prstGeom prst="rect">
@@ -9698,8 +9654,8 @@
         </p:nvSpPr>
         <p:spPr>
           <a:xfrm>
-            <a:off x="5522976" y="4946142"/>
-            <a:ext cx="3584447" cy="2186177"/>
+            <a:off x="5522976" y="4608576"/>
+            <a:ext cx="3584447" cy="2523743"/>
           </a:xfrm>
           <a:prstGeom prst="rect">
             <a:avLst/>
@@ -9765,8 +9721,8 @@
         </p:nvSpPr>
         <p:spPr>
           <a:xfrm>
-            <a:off x="9619488" y="3190494"/>
-            <a:ext cx="4096511" cy="4152137"/>
+            <a:off x="9619488" y="2852928"/>
+            <a:ext cx="4096511" cy="4489703"/>
           </a:xfrm>
           <a:prstGeom prst="rect">
             <a:avLst/>
@@ -9808,7 +9764,7 @@
         </p:nvSpPr>
         <p:spPr>
           <a:xfrm>
-            <a:off x="9619488" y="3190494"/>
+            <a:off x="9619488" y="2852928"/>
             <a:ext cx="4096511" cy="59436"/>
           </a:xfrm>
           <a:prstGeom prst="rect">
@@ -9851,7 +9807,7 @@
         </p:nvSpPr>
         <p:spPr>
           <a:xfrm>
-            <a:off x="9875519" y="3574542"/>
+            <a:off x="9875519" y="3236976"/>
             <a:ext cx="3584447" cy="1188720"/>
           </a:xfrm>
           <a:prstGeom prst="rect">
@@ -9896,8 +9852,8 @@
         </p:nvSpPr>
         <p:spPr>
           <a:xfrm>
-            <a:off x="9875519" y="4946142"/>
-            <a:ext cx="3584447" cy="2186177"/>
+            <a:off x="9875519" y="4608576"/>
+            <a:ext cx="3584447" cy="2523743"/>
           </a:xfrm>
           <a:prstGeom prst="rect">
             <a:avLst/>
@@ -9928,7 +9884,7 @@
               </a:defRPr>
             </a:pPr>
             <a:r>
-              <a:t>Paid artist, teaching and</a:t>
+              <a:t>Fees for artists, teaching and</a:t>
             </a:r>
           </a:p>
           <a:p>
@@ -9950,7 +9906,7 @@
               </a:defRPr>
             </a:pPr>
             <a:r>
-              <a:t>program contribution.</a:t>
+              <a:t>public programs.</a:t>
             </a:r>
           </a:p>
         </p:txBody>
@@ -10244,7 +10200,7 @@
               </a:defRPr>
             </a:pPr>
             <a:r>
-              <a:t>The audience case to validate.</a:t>
+              <a:t>Audience targets</a:t>
             </a:r>
           </a:p>
         </p:txBody>
@@ -10289,7 +10245,7 @@
               </a:defRPr>
             </a:pPr>
             <a:r>
-              <a:t>No sponsor is being sold an already-proven crowd.</a:t>
+              <a:t>The project has no measured event audience to offer sponsors.</a:t>
             </a:r>
           </a:p>
         </p:txBody>
@@ -11133,7 +11089,7 @@
               </a:defRPr>
             </a:pPr>
             <a:r>
-              <a:t>Choose a meaningful chapter.</a:t>
+              <a:t>Program sponsorship options</a:t>
             </a:r>
           </a:p>
         </p:txBody>
@@ -11178,7 +11134,7 @@
               </a:defRPr>
             </a:pPr>
             <a:r>
-              <a:t>Activations follow artistic/site/rights approval and are costed.</a:t>
+              <a:t>Price each activity and obtain site, artist and rights approval before offering it.</a:t>
             </a:r>
           </a:p>
         </p:txBody>
@@ -12132,7 +12088,7 @@
               </a:defRPr>
             </a:pPr>
             <a:r>
-              <a:t>A package architecture to test.</a:t>
+              <a:t>Sponsorship packages</a:t>
             </a:r>
           </a:p>
         </p:txBody>
@@ -12177,7 +12133,7 @@
               </a:defRPr>
             </a:pPr>
             <a:r>
-              <a:t>Cash target $1.25m. No package is sold or demand validated.</a:t>
+              <a:t>The $1.25m target assumes sales of these proposed packages. No sponsor has bought one.</a:t>
             </a:r>
           </a:p>
         </p:txBody>
@@ -13263,7 +13219,7 @@
               </a:defRPr>
             </a:pPr>
             <a:r>
-              <a:t>Benefits with a delivery owner.</a:t>
+              <a:t>Contracted benefits and evidence</a:t>
             </a:r>
           </a:p>
         </p:txBody>
@@ -13308,7 +13264,7 @@
               </a:defRPr>
             </a:pPr>
             <a:r>
-              <a:t>Define the audience, cost, rights, capacity and proof for each benefit.</a:t>
+              <a:t>Assign a responsible person, cost, rights, capacity and delivery measure to each benefit.</a:t>
             </a:r>
           </a:p>
         </p:txBody>
@@ -14218,7 +14174,7 @@
               </a:defRPr>
             </a:pPr>
             <a:r>
-              <a:t>Creative integrity protects value.</a:t>
+              <a:t>Editorial independence and privacy</a:t>
             </a:r>
           </a:p>
         </p:txBody>
@@ -14263,7 +14219,7 @@
               </a:defRPr>
             </a:pPr>
             <a:r>
-              <a:t>A strong brand association comes from real quality.</a:t>
+              <a:t>Sponsor terms must protect artist selection, image rights and visitor information.</a:t>
             </a:r>
           </a:p>
         </p:txBody>
@@ -15151,7 +15107,7 @@
               </a:defRPr>
             </a:pPr>
             <a:r>
-              <a:t>A useful destination week.</a:t>
+              <a:t>Proposed event week</a:t>
             </a:r>
           </a:p>
         </p:txBody>
@@ -15196,7 +15152,7 @@
               </a:defRPr>
             </a:pPr>
             <a:r>
-              <a:t>Proposed August 9–15, 2027; dates/site remain unbooked.</a:t>
+              <a:t>August 9–15, 2027 remains unbooked. The program and site need approval.</a:t>
             </a:r>
           </a:p>
         </p:txBody>
@@ -16128,7 +16084,7 @@
               </a:defRPr>
             </a:pPr>
             <a:r>
-              <a:t>What we will measure.</a:t>
+              <a:t>Sponsor reporting</a:t>
             </a:r>
           </a:p>
         </p:txBody>
@@ -16173,7 +16129,7 @@
               </a:defRPr>
             </a:pPr>
             <a:r>
-              <a:t>Measure contracted value rather than inventing reach.</a:t>
+              <a:t>Report actual delivery, participation and artist outcomes against the contract.</a:t>
             </a:r>
           </a:p>
         </p:txBody>
